--- a/assets/powerpoints/module-vetements/C1-demander-un-avis.pptx
+++ b/assets/powerpoints/module-vetements/C1-demander-un-avis.pptx
@@ -12430,7 +12430,25 @@
                 </a:solidFill>
                 <a:latin typeface="Verdana"/>
               </a:rPr>
-              <a:t>Commencer par ce qui est vrai et positif désamorce la critique. La personne entend le « mais » sans se fermer. La formule inverse — « Il est court, mais il est beau » — laisse l'impression contraire : c'est la &lt;b&gt;deuxième&lt;/b&gt; moitié qu'on retient.</a:t>
+              <a:t>Commencer par ce qui est vrai et positif désamorce la critique. La personne entend le « mais » sans se fermer. La formule inverse — « Il est court, mais il est beau » — laisse l'impression contraire : c'est la </a:t>
+            </a:r>
+            <a:r>
+              <a:rPr sz="2000" b="1" i="0">
+                <a:solidFill>
+                  <a:srgbClr val="4B4F52"/>
+                </a:solidFill>
+                <a:latin typeface="Verdana"/>
+              </a:rPr>
+              <a:t>deuxième</a:t>
+            </a:r>
+            <a:r>
+              <a:rPr sz="2000" b="0" i="0">
+                <a:solidFill>
+                  <a:srgbClr val="4B4F52"/>
+                </a:solidFill>
+                <a:latin typeface="Verdana"/>
+              </a:rPr>
+              <a:t> moitié qu'on retient.</a:t>
             </a:r>
           </a:p>
         </p:txBody>
